--- a/livrables/Workshop2026-M2-G6/Workshop2026-M2-G6-Pres.pptx
+++ b/livrables/Workshop2026-M2-G6/Workshop2026-M2-G6-Pres.pptx
@@ -10144,7 +10144,7 @@
         <p:spPr>
           <a:xfrm>
             <a:off x="841248" y="1463040"/>
-            <a:ext cx="6949440" cy="4231931"/>
+            <a:ext cx="6949440" cy="3920596"/>
           </a:xfrm>
           <a:prstGeom prst="rect">
             <a:avLst/>
